--- a/Innovation Proposal Submisison.pptx
+++ b/Innovation Proposal Submisison.pptx
@@ -189,30 +189,6 @@
 
 <file path=ppt/changesInfos/changesInfo1.xml><?xml version="1.0" encoding="utf-8"?>
 <pc:chgInfo xmlns:a="http://schemas.openxmlformats.org/drawingml/2006/main" xmlns:r="http://schemas.openxmlformats.org/officeDocument/2006/relationships" xmlns:ac="http://schemas.microsoft.com/office/drawing/2013/main/command" xmlns:pc="http://schemas.microsoft.com/office/powerpoint/2013/main/command">
-  <pc:docChgLst>
-    <pc:chgData name="Andrew Ying Cheng Chew" userId="557222b0-685e-422a-be6c-6e12fb38b192" providerId="ADAL" clId="{B3A703D8-3571-409A-AC83-F30635C0B261}"/>
-    <pc:docChg chg="undo redo custSel addSld delSld modSld sldOrd">
-      <pc:chgData name="Andrew Ying Cheng Chew" userId="557222b0-685e-422a-be6c-6e12fb38b192" providerId="ADAL" clId="{B3A703D8-3571-409A-AC83-F30635C0B261}" dt="2026-06-03T09:28:24.999" v="6306" actId="1076"/>
-      <pc:docMkLst>
-        <pc:docMk/>
-      </pc:docMkLst>
-      <pc:sldChg chg="addSp delSp modSp mod">
-        <pc:chgData name="Andrew Ying Cheng Chew" userId="557222b0-685e-422a-be6c-6e12fb38b192" providerId="ADAL" clId="{B3A703D8-3571-409A-AC83-F30635C0B261}" dt="2026-06-02T08:36:01.346" v="4336" actId="20577"/>
-        <pc:sldMkLst>
-          <pc:docMk/>
-          <pc:sldMk cId="657955980" sldId="1557"/>
-        </pc:sldMkLst>
-        <pc:spChg chg="mod">
-          <ac:chgData name="Andrew Ying Cheng Chew" userId="557222b0-685e-422a-be6c-6e12fb38b192" providerId="ADAL" clId="{B3A703D8-3571-409A-AC83-F30635C0B261}" dt="2026-06-02T08:35:46.347" v="4324" actId="20577"/>
-          <ac:spMkLst>
-            <pc:docMk/>
-            <pc:sldMk cId="657955980" sldId="1557"/>
-            <ac:spMk id="2" creationId="{E0489B50-B84C-6216-B4C8-8B98D99027F1}"/>
-          </ac:spMkLst>
-        </pc:spChg>
-      </pc:sldChg>
-    </pc:docChg>
-  </pc:docChgLst>
   <pc:docChgLst>
     <pc:chgData name="Philip Pham" userId="43da9bb4-070d-4ed6-8fce-34a277b594b1" providerId="ADAL" clId="{C978F5D8-A556-49E5-9262-8B61DEAA9F7B}"/>
     <pc:docChg chg="undo custSel addSld delSld modSld">
@@ -614,6 +590,30 @@
       </pc:sldChg>
     </pc:docChg>
   </pc:docChgLst>
+  <pc:docChgLst>
+    <pc:chgData name="Andrew Ying Cheng Chew" userId="557222b0-685e-422a-be6c-6e12fb38b192" providerId="ADAL" clId="{B3A703D8-3571-409A-AC83-F30635C0B261}"/>
+    <pc:docChg chg="undo redo custSel addSld delSld modSld sldOrd">
+      <pc:chgData name="Andrew Ying Cheng Chew" userId="557222b0-685e-422a-be6c-6e12fb38b192" providerId="ADAL" clId="{B3A703D8-3571-409A-AC83-F30635C0B261}" dt="2026-06-03T09:28:24.999" v="6306" actId="1076"/>
+      <pc:docMkLst>
+        <pc:docMk/>
+      </pc:docMkLst>
+      <pc:sldChg chg="addSp delSp modSp mod">
+        <pc:chgData name="Andrew Ying Cheng Chew" userId="557222b0-685e-422a-be6c-6e12fb38b192" providerId="ADAL" clId="{B3A703D8-3571-409A-AC83-F30635C0B261}" dt="2026-06-02T08:36:01.346" v="4336" actId="20577"/>
+        <pc:sldMkLst>
+          <pc:docMk/>
+          <pc:sldMk cId="657955980" sldId="1557"/>
+        </pc:sldMkLst>
+        <pc:spChg chg="mod">
+          <ac:chgData name="Andrew Ying Cheng Chew" userId="557222b0-685e-422a-be6c-6e12fb38b192" providerId="ADAL" clId="{B3A703D8-3571-409A-AC83-F30635C0B261}" dt="2026-06-02T08:35:46.347" v="4324" actId="20577"/>
+          <ac:spMkLst>
+            <pc:docMk/>
+            <pc:sldMk cId="657955980" sldId="1557"/>
+            <ac:spMk id="2" creationId="{E0489B50-B84C-6216-B4C8-8B98D99027F1}"/>
+          </ac:spMkLst>
+        </pc:spChg>
+      </pc:sldChg>
+    </pc:docChg>
+  </pc:docChgLst>
 </pc:chgInfo>
 </file>
 
@@ -699,7 +699,7 @@
           <a:p>
             <a:fld id="{86C3DE13-261D-48CD-BD2E-BE5EEFB205AC}" type="datetimeFigureOut">
               <a:rPr lang="en-SG" smtClean="0"/>
-              <a:t>26/6/2026</a:t>
+              <a:t>8/7/2026</a:t>
             </a:fld>
             <a:endParaRPr lang="en-SG"/>
           </a:p>
@@ -864,7 +864,7 @@
           <a:p>
             <a:fld id="{3060024C-0EA0-4B2F-81DF-AFD21CDD6DDE}" type="datetimeFigureOut">
               <a:rPr lang="en-SG" smtClean="0"/>
-              <a:t>26/6/2026</a:t>
+              <a:t>8/7/2026</a:t>
             </a:fld>
             <a:endParaRPr lang="en-SG"/>
           </a:p>
@@ -1671,7 +1671,7 @@
           <a:p>
             <a:fld id="{35A048FB-3E55-4882-8DFF-412236E27EE3}" type="datetimeFigureOut">
               <a:rPr lang="en-SG" smtClean="0"/>
-              <a:t>26/6/2026</a:t>
+              <a:t>8/7/2026</a:t>
             </a:fld>
             <a:endParaRPr lang="en-SG"/>
           </a:p>
@@ -5879,7 +5879,7 @@
           <a:p>
             <a:fld id="{35A048FB-3E55-4882-8DFF-412236E27EE3}" type="datetimeFigureOut">
               <a:rPr lang="en-SG" smtClean="0"/>
-              <a:t>26/6/2026</a:t>
+              <a:t>8/7/2026</a:t>
             </a:fld>
             <a:endParaRPr lang="en-SG"/>
           </a:p>
@@ -15066,7 +15066,7 @@
           <a:p>
             <a:fld id="{35A048FB-3E55-4882-8DFF-412236E27EE3}" type="datetimeFigureOut">
               <a:rPr lang="en-SG" smtClean="0"/>
-              <a:t>26/6/2026</a:t>
+              <a:t>8/7/2026</a:t>
             </a:fld>
             <a:endParaRPr lang="en-SG"/>
           </a:p>
@@ -19371,7 +19371,7 @@
           <a:p>
             <a:fld id="{35A048FB-3E55-4882-8DFF-412236E27EE3}" type="datetimeFigureOut">
               <a:rPr lang="en-SG" smtClean="0"/>
-              <a:t>26/6/2026</a:t>
+              <a:t>8/7/2026</a:t>
             </a:fld>
             <a:endParaRPr lang="en-SG"/>
           </a:p>
@@ -23288,7 +23288,7 @@
           <a:p>
             <a:fld id="{35A048FB-3E55-4882-8DFF-412236E27EE3}" type="datetimeFigureOut">
               <a:rPr lang="en-SG" smtClean="0"/>
-              <a:t>26/6/2026</a:t>
+              <a:t>8/7/2026</a:t>
             </a:fld>
             <a:endParaRPr lang="en-SG"/>
           </a:p>
@@ -23930,7 +23930,7 @@
           <a:p>
             <a:fld id="{35A048FB-3E55-4882-8DFF-412236E27EE3}" type="datetimeFigureOut">
               <a:rPr lang="en-SG" smtClean="0"/>
-              <a:t>26/6/2026</a:t>
+              <a:t>8/7/2026</a:t>
             </a:fld>
             <a:endParaRPr lang="en-SG"/>
           </a:p>
@@ -24025,7 +24025,7 @@
           <a:p>
             <a:fld id="{35A048FB-3E55-4882-8DFF-412236E27EE3}" type="datetimeFigureOut">
               <a:rPr lang="en-SG" smtClean="0"/>
-              <a:t>26/6/2026</a:t>
+              <a:t>8/7/2026</a:t>
             </a:fld>
             <a:endParaRPr lang="en-SG"/>
           </a:p>
@@ -24302,7 +24302,7 @@
           <a:p>
             <a:fld id="{35A048FB-3E55-4882-8DFF-412236E27EE3}" type="datetimeFigureOut">
               <a:rPr lang="en-SG" smtClean="0"/>
-              <a:t>26/6/2026</a:t>
+              <a:t>8/7/2026</a:t>
             </a:fld>
             <a:endParaRPr lang="en-SG"/>
           </a:p>
@@ -24932,7 +24932,7 @@
           <a:p>
             <a:fld id="{35A048FB-3E55-4882-8DFF-412236E27EE3}" type="datetimeFigureOut">
               <a:rPr lang="en-SG" smtClean="0"/>
-              <a:t>26/6/2026</a:t>
+              <a:t>8/7/2026</a:t>
             </a:fld>
             <a:endParaRPr lang="en-SG"/>
           </a:p>
@@ -27851,7 +27851,7 @@
           <p:nvPr>
             <p:extLst>
               <p:ext uri="{D42A27DB-BD31-4B8C-83A1-F6EECF244321}">
-                <p14:modId xmlns:p14="http://schemas.microsoft.com/office/powerpoint/2010/main" val="1231031696"/>
+                <p14:modId xmlns:p14="http://schemas.microsoft.com/office/powerpoint/2010/main" val="267170530"/>
               </p:ext>
             </p:extLst>
           </p:nvPr>
@@ -27930,20 +27930,12 @@
                     <a:lstStyle/>
                     <a:p>
                       <a:r>
-                        <a:rPr lang="en-US" dirty="0">
+                        <a:rPr lang="en-US">
                           <a:solidFill>
                             <a:srgbClr val="FFFF4F"/>
                           </a:solidFill>
                         </a:rPr>
-                        <a:t>Key </a:t>
-                      </a:r>
-                      <a:r>
-                        <a:rPr lang="en-US" dirty="0" err="1">
-                          <a:solidFill>
-                            <a:srgbClr val="FFFF4F"/>
-                          </a:solidFill>
-                        </a:rPr>
-                        <a:t>benifits</a:t>
+                        <a:t>Key benefits</a:t>
                       </a:r>
                       <a:endParaRPr lang="en-US" dirty="0">
                         <a:solidFill>
@@ -29496,6 +29488,26 @@
 </file>
 
 <file path=customXml/item1.xml><?xml version="1.0" encoding="utf-8"?>
+<?mso-contentType ?>
+<FormTemplates xmlns="http://schemas.microsoft.com/sharepoint/v3/contenttype/forms">
+  <Display>DocumentLibraryForm</Display>
+  <Edit>DocumentLibraryForm</Edit>
+  <New>DocumentLibraryForm</New>
+</FormTemplates>
+</file>
+
+<file path=customXml/item2.xml><?xml version="1.0" encoding="utf-8"?>
+<p:properties xmlns:p="http://schemas.microsoft.com/office/2006/metadata/properties" xmlns:xsi="http://www.w3.org/2001/XMLSchema-instance" xmlns:pc="http://schemas.microsoft.com/office/infopath/2007/PartnerControls">
+  <documentManagement>
+    <TaxCatchAll xmlns="9ce43b64-abed-4e93-a4e4-b9d5c622cf07" xsi:nil="true"/>
+    <lcf76f155ced4ddcb4097134ff3c332f xmlns="2816e1c4-d29c-4d59-a309-0d32024c2b7e">
+      <Terms xmlns="http://schemas.microsoft.com/office/infopath/2007/PartnerControls"/>
+    </lcf76f155ced4ddcb4097134ff3c332f>
+  </documentManagement>
+</p:properties>
+</file>
+
+<file path=customXml/item3.xml><?xml version="1.0" encoding="utf-8"?>
 <ct:contentTypeSchema xmlns:ct="http://schemas.microsoft.com/office/2006/metadata/contentType" xmlns:ma="http://schemas.microsoft.com/office/2006/metadata/properties/metaAttributes" ct:_="" ma:_="" ma:contentTypeName="Document" ma:contentTypeID="0x010100AD1BEA7FABE0ED42A3277887DF286F08" ma:contentTypeVersion="10" ma:contentTypeDescription="Create a new document." ma:contentTypeScope="" ma:versionID="2cc50a622ca45fb1332407d372e3542c">
   <xsd:schema xmlns:xsd="http://www.w3.org/2001/XMLSchema" xmlns:xs="http://www.w3.org/2001/XMLSchema" xmlns:p="http://schemas.microsoft.com/office/2006/metadata/properties" xmlns:ns2="2816e1c4-d29c-4d59-a309-0d32024c2b7e" xmlns:ns3="9ce43b64-abed-4e93-a4e4-b9d5c622cf07" targetNamespace="http://schemas.microsoft.com/office/2006/metadata/properties" ma:root="true" ma:fieldsID="e095f31877f1734f7e2e0cdebd02345c" ns2:_="" ns3:_="">
     <xsd:import namespace="2816e1c4-d29c-4d59-a309-0d32024c2b7e"/>
@@ -29684,41 +29696,10 @@
 </ct:contentTypeSchema>
 </file>
 
-<file path=customXml/item2.xml><?xml version="1.0" encoding="utf-8"?>
-<p:properties xmlns:p="http://schemas.microsoft.com/office/2006/metadata/properties" xmlns:xsi="http://www.w3.org/2001/XMLSchema-instance" xmlns:pc="http://schemas.microsoft.com/office/infopath/2007/PartnerControls">
-  <documentManagement>
-    <TaxCatchAll xmlns="9ce43b64-abed-4e93-a4e4-b9d5c622cf07" xsi:nil="true"/>
-    <lcf76f155ced4ddcb4097134ff3c332f xmlns="2816e1c4-d29c-4d59-a309-0d32024c2b7e">
-      <Terms xmlns="http://schemas.microsoft.com/office/infopath/2007/PartnerControls"/>
-    </lcf76f155ced4ddcb4097134ff3c332f>
-  </documentManagement>
-</p:properties>
-</file>
-
-<file path=customXml/item3.xml><?xml version="1.0" encoding="utf-8"?>
-<?mso-contentType ?>
-<FormTemplates xmlns="http://schemas.microsoft.com/sharepoint/v3/contenttype/forms">
-  <Display>DocumentLibraryForm</Display>
-  <Edit>DocumentLibraryForm</Edit>
-  <New>DocumentLibraryForm</New>
-</FormTemplates>
-</file>
-
 <file path=customXml/itemProps1.xml><?xml version="1.0" encoding="utf-8"?>
-<ds:datastoreItem xmlns:ds="http://schemas.openxmlformats.org/officeDocument/2006/customXml" ds:itemID="{D2D7340B-F72E-4F0C-BD3B-C0BA59CFB4CF}">
+<ds:datastoreItem xmlns:ds="http://schemas.openxmlformats.org/officeDocument/2006/customXml" ds:itemID="{32F1900E-8A61-4DAD-BBF5-44CEA40ABE90}">
   <ds:schemaRefs>
-    <ds:schemaRef ds:uri="http://schemas.microsoft.com/office/2006/metadata/contentType"/>
-    <ds:schemaRef ds:uri="http://schemas.microsoft.com/office/2006/metadata/properties/metaAttributes"/>
-    <ds:schemaRef ds:uri="http://www.w3.org/2001/XMLSchema"/>
-    <ds:schemaRef ds:uri="http://schemas.microsoft.com/office/2006/metadata/properties"/>
-    <ds:schemaRef ds:uri="2816e1c4-d29c-4d59-a309-0d32024c2b7e"/>
-    <ds:schemaRef ds:uri="9ce43b64-abed-4e93-a4e4-b9d5c622cf07"/>
-    <ds:schemaRef ds:uri="http://schemas.microsoft.com/office/2006/documentManagement/types"/>
-    <ds:schemaRef ds:uri="http://schemas.microsoft.com/office/infopath/2007/PartnerControls"/>
-    <ds:schemaRef ds:uri="http://schemas.openxmlformats.org/package/2006/metadata/core-properties"/>
-    <ds:schemaRef ds:uri="http://purl.org/dc/elements/1.1/"/>
-    <ds:schemaRef ds:uri="http://purl.org/dc/terms/"/>
-    <ds:schemaRef ds:uri="http://schemas.microsoft.com/internal/obd"/>
+    <ds:schemaRef ds:uri="http://schemas.microsoft.com/sharepoint/v3/contenttype/forms"/>
   </ds:schemaRefs>
 </ds:datastoreItem>
 </file>
@@ -29742,9 +29723,20 @@
 </file>
 
 <file path=customXml/itemProps3.xml><?xml version="1.0" encoding="utf-8"?>
-<ds:datastoreItem xmlns:ds="http://schemas.openxmlformats.org/officeDocument/2006/customXml" ds:itemID="{32F1900E-8A61-4DAD-BBF5-44CEA40ABE90}">
+<ds:datastoreItem xmlns:ds="http://schemas.openxmlformats.org/officeDocument/2006/customXml" ds:itemID="{D2D7340B-F72E-4F0C-BD3B-C0BA59CFB4CF}">
   <ds:schemaRefs>
-    <ds:schemaRef ds:uri="http://schemas.microsoft.com/sharepoint/v3/contenttype/forms"/>
+    <ds:schemaRef ds:uri="http://schemas.microsoft.com/office/2006/metadata/contentType"/>
+    <ds:schemaRef ds:uri="http://schemas.microsoft.com/office/2006/metadata/properties/metaAttributes"/>
+    <ds:schemaRef ds:uri="http://www.w3.org/2001/XMLSchema"/>
+    <ds:schemaRef ds:uri="http://schemas.microsoft.com/office/2006/metadata/properties"/>
+    <ds:schemaRef ds:uri="2816e1c4-d29c-4d59-a309-0d32024c2b7e"/>
+    <ds:schemaRef ds:uri="9ce43b64-abed-4e93-a4e4-b9d5c622cf07"/>
+    <ds:schemaRef ds:uri="http://schemas.microsoft.com/office/2006/documentManagement/types"/>
+    <ds:schemaRef ds:uri="http://schemas.microsoft.com/office/infopath/2007/PartnerControls"/>
+    <ds:schemaRef ds:uri="http://schemas.openxmlformats.org/package/2006/metadata/core-properties"/>
+    <ds:schemaRef ds:uri="http://purl.org/dc/elements/1.1/"/>
+    <ds:schemaRef ds:uri="http://purl.org/dc/terms/"/>
+    <ds:schemaRef ds:uri="http://schemas.microsoft.com/internal/obd"/>
   </ds:schemaRefs>
 </ds:datastoreItem>
 </file>